--- a/curso/pptx/S54.pptx
+++ b/curso/pptx/S54.pptx
@@ -4203,7 +4203,7 @@
                 </a:solidFill>
                 <a:latin typeface="Nunito Sans"/>
               </a:rPr>
-              <a:t>No busca la verdad: busca que sigas mirando</a:t>
+              <a:t>它不追求真相：它想让你一直看下去</a:t>
             </a:r>
           </a:p>
           <a:p>
@@ -4228,7 +4228,7 @@
                 </a:solidFill>
                 <a:latin typeface="Nunito Sans"/>
               </a:rPr>
-              <a:t>La burbuja también la hacen mis elecciones</a:t>
+              <a:t>茧房也是我自己的选择造成的</a:t>
             </a:r>
           </a:p>
           <a:p>
@@ -4253,7 +4253,7 @@
                 </a:solidFill>
                 <a:latin typeface="Nunito Sans"/>
               </a:rPr>
-              <a:t>Mi pantalla no es el mundo</a:t>
+              <a:t>我的屏幕不是世界</a:t>
             </a:r>
           </a:p>
         </p:txBody>
@@ -6794,7 +6794,7 @@
                 </a:solidFill>
                 <a:latin typeface="Nunito Sans"/>
               </a:rPr>
-              <a:t>Esquiva tu juicio</a:t>
+              <a:t>绕开你的判断</a:t>
             </a:r>
           </a:p>
           <a:p>
@@ -6819,7 +6819,7 @@
                 </a:solidFill>
                 <a:latin typeface="Nunito Sans"/>
               </a:rPr>
-              <a:t>Mete prisa y esconde datos</a:t>
+              <a:t>催你，还隐藏信息</a:t>
             </a:r>
           </a:p>
           <a:p>
@@ -6844,7 +6844,7 @@
                 </a:solidFill>
                 <a:latin typeface="Nunito Sans"/>
               </a:rPr>
-              <a:t>Usa la emoción en lugar de razones</a:t>
+              <a:t>用情绪代替理由</a:t>
             </a:r>
           </a:p>
         </p:txBody>
@@ -6974,7 +6974,7 @@
                 </a:solidFill>
                 <a:latin typeface="Nunito Sans"/>
               </a:rPr>
-              <a:t>Da razones</a:t>
+              <a:t>给出理由</a:t>
             </a:r>
           </a:p>
           <a:p>
@@ -6999,7 +6999,7 @@
                 </a:solidFill>
                 <a:latin typeface="Nunito Sans"/>
               </a:rPr>
-              <a:t>Te deja tiempo</a:t>
+              <a:t>给你留出时间</a:t>
             </a:r>
           </a:p>
           <a:p>
@@ -7024,7 +7024,7 @@
                 </a:solidFill>
                 <a:latin typeface="Nunito Sans"/>
               </a:rPr>
-              <a:t>Puedes comprobarlo</a:t>
+              <a:t>你可以去核实</a:t>
             </a:r>
           </a:p>
           <a:p>
@@ -7049,7 +7049,7 @@
                 </a:solidFill>
                 <a:latin typeface="Nunito Sans"/>
               </a:rPr>
-              <a:t>Puede emocionar y ser honesto</a:t>
+              <a:t>可以打动人，同时又诚实</a:t>
             </a:r>
           </a:p>
         </p:txBody>
@@ -7672,7 +7672,7 @@
                 </a:solidFill>
                 <a:latin typeface="Nunito Sans"/>
               </a:rPr>
-              <a:t>Recomendar no es vender: ¿le paga o le regala algo una marca?</a:t>
+              <a:t>推荐不是卖货：有没有品牌付钱或送东西给他？</a:t>
             </a:r>
           </a:p>
           <a:p>
@@ -7697,7 +7697,7 @@
                 </a:solidFill>
                 <a:latin typeface="Nunito Sans"/>
               </a:rPr>
-              <a:t>Publicidad encubierta:</a:t>
+              <a:t>隐形广告：</a:t>
             </a:r>
             <a:r>
               <a:rPr sz="2800" b="0">
@@ -7706,7 +7706,7 @@
                 </a:solidFill>
                 <a:latin typeface="Nunito Sans"/>
               </a:rPr>
-              <a:t> un anuncio disfrazado de opinión personal.</a:t>
+              <a:t>伪装成个人意见的广告。</a:t>
             </a:r>
           </a:p>
           <a:p>
@@ -7731,7 +7731,7 @@
                 </a:solidFill>
                 <a:latin typeface="Nunito Sans"/>
               </a:rPr>
-              <a:t>En España no se puede esconder: se avisa con </a:t>
+              <a:t>在西班牙不能隐藏：要用 </a:t>
             </a:r>
             <a:r>
               <a:rPr sz="2800" b="1">
@@ -7749,7 +7749,7 @@
                 </a:solidFill>
                 <a:latin typeface="Nunito Sans"/>
               </a:rPr>
-              <a:t> o «publicidad».</a:t>
+              <a:t> 或“广告”来提示。</a:t>
             </a:r>
           </a:p>
           <a:p>
@@ -7774,7 +7774,7 @@
                 </a:solidFill>
                 <a:latin typeface="Nunito Sans"/>
               </a:rPr>
-              <a:t>La marca compra la </a:t>
+              <a:t>品牌买下的是网红的</a:t>
             </a:r>
             <a:r>
               <a:rPr sz="2800" b="1">
@@ -7783,7 +7783,7 @@
                 </a:solidFill>
                 <a:latin typeface="Nunito Sans"/>
               </a:rPr>
-              <a:t>autenticidad</a:t>
+              <a:t>真实感</a:t>
             </a:r>
             <a:r>
               <a:rPr sz="2800" b="0">
@@ -7792,7 +7792,7 @@
                 </a:solidFill>
                 <a:latin typeface="Nunito Sans"/>
               </a:rPr>
-              <a:t> del influencer.</a:t>
+              <a:t>。</a:t>
             </a:r>
           </a:p>
         </p:txBody>
